--- a/交付物/演示文稿/M0_演示文稿_CFG-5_第1课_会感知会应答_v2.pptx
+++ b/交付物/演示文稿/M0_演示文稿_CFG-5_第1课_会感知会应答_v2.pptx
@@ -2529,7 +2529,7 @@
                 <a:latin typeface="MiSans"/>
                 <a:ea typeface="MiSans"/>
               </a:rPr>
-              <a:t>柴火创客学院 M0 · 零基础智能硬件入门 · 第 1 课</a:t>
+              <a:t>柴火创客学园 M0 · 零基础智能硬件入门 · 第 1 课</a:t>
             </a:r>
             <a:endParaRPr lang="en-US" sz="2000"/>
           </a:p>
@@ -2613,7 +2613,7 @@
                 <a:latin typeface="MiSans"/>
                 <a:ea typeface="MiSans"/>
               </a:rPr>
-              <a:t>柴火创客学院 ｜ 2026</a:t>
+              <a:t>柴火创客学园 ｜ 2026</a:t>
             </a:r>
             <a:endParaRPr lang="en-US" sz="1400"/>
           </a:p>
@@ -3186,7 +3186,7 @@
                 <a:latin typeface="Noto Sans SC"/>
                 <a:ea typeface="Noto Sans SC"/>
               </a:rPr>
-              <a:t>柴火创客学院 M0 · 第 1 课 · 用 AI 点亮你的第一块硬件</a:t>
+              <a:t>柴火创客学园 M0 · 第 1 课 · 用 AI 点亮你的第一块硬件</a:t>
             </a:r>
             <a:endParaRPr lang="en-US" sz="1100"/>
           </a:p>
@@ -7322,7 +7322,7 @@
                 <a:latin typeface="Noto Sans SC"/>
                 <a:ea typeface="Noto Sans SC"/>
               </a:rPr>
-              <a:t>柴火创客学院 M0 · 第 1 课 · 用 AI 点亮你的第一块硬件</a:t>
+              <a:t>柴火创客学园 M0 · 第 1 课 · 用 AI 点亮你的第一块硬件</a:t>
             </a:r>
             <a:endParaRPr lang="en-US" sz="1100"/>
           </a:p>
@@ -7778,7 +7778,7 @@
                 <a:latin typeface="Noto Sans SC"/>
                 <a:ea typeface="Noto Sans SC"/>
               </a:rPr>
-              <a:t>柴火创客学院 M0 · 第 1 课 · 用 AI 点亮你的第一块硬件</a:t>
+              <a:t>柴火创客学园 M0 · 第 1 课 · 用 AI 点亮你的第一块硬件</a:t>
             </a:r>
             <a:endParaRPr lang="en-US" sz="1100"/>
           </a:p>
@@ -8345,7 +8345,7 @@
                 <a:latin typeface="Noto Sans SC"/>
                 <a:ea typeface="Noto Sans SC"/>
               </a:rPr>
-              <a:t>柴火创客学院 M0 · 第 1 课 · 用 AI 点亮你的第一块硬件</a:t>
+              <a:t>柴火创客学园 M0 · 第 1 课 · 用 AI 点亮你的第一块硬件</a:t>
             </a:r>
             <a:endParaRPr lang="en-US" sz="1100"/>
           </a:p>
@@ -8812,7 +8812,7 @@
                 <a:latin typeface="Noto Sans SC"/>
                 <a:ea typeface="Noto Sans SC"/>
               </a:rPr>
-              <a:t>柴火创客学院 M0 · 第 1 课 · 用 AI 点亮你的第一块硬件</a:t>
+              <a:t>柴火创客学园 M0 · 第 1 课 · 用 AI 点亮你的第一块硬件</a:t>
             </a:r>
             <a:endParaRPr lang="en-US" sz="1100"/>
           </a:p>
@@ -9387,7 +9387,7 @@
                 <a:latin typeface="Noto Sans SC"/>
                 <a:ea typeface="Noto Sans SC"/>
               </a:rPr>
-              <a:t>柴火创客学院 M0 · 第 1 课 · 用 AI 点亮你的第一块硬件</a:t>
+              <a:t>柴火创客学园 M0 · 第 1 课 · 用 AI 点亮你的第一块硬件</a:t>
             </a:r>
             <a:endParaRPr lang="en-US" sz="1100"/>
           </a:p>
@@ -10101,7 +10101,7 @@
                 <a:latin typeface="Noto Sans SC"/>
                 <a:ea typeface="Noto Sans SC"/>
               </a:rPr>
-              <a:t>柴火创客学院 M0 · 第 1 课 · 用 AI 点亮你的第一块硬件</a:t>
+              <a:t>柴火创客学园 M0 · 第 1 课 · 用 AI 点亮你的第一块硬件</a:t>
             </a:r>
             <a:endParaRPr lang="en-US" sz="1100"/>
           </a:p>
@@ -10738,7 +10738,7 @@
                 <a:latin typeface="Noto Sans SC"/>
                 <a:ea typeface="Noto Sans SC"/>
               </a:rPr>
-              <a:t>柴火创客学院 M0 · 第 1 课 · 用 AI 点亮你的第一块硬件</a:t>
+              <a:t>柴火创客学园 M0 · 第 1 课 · 用 AI 点亮你的第一块硬件</a:t>
             </a:r>
             <a:endParaRPr lang="en-US" sz="1100"/>
           </a:p>
@@ -11177,7 +11177,7 @@
                 <a:latin typeface="Noto Sans SC"/>
                 <a:ea typeface="Noto Sans SC"/>
               </a:rPr>
-              <a:t>柴火创客学院 M0 · 第 1 课 · 用 AI 点亮你的第一块硬件</a:t>
+              <a:t>柴火创客学园 M0 · 第 1 课 · 用 AI 点亮你的第一块硬件</a:t>
             </a:r>
             <a:endParaRPr lang="en-US" sz="1100"/>
           </a:p>
@@ -11778,7 +11778,7 @@
                 <a:latin typeface="Noto Sans SC"/>
                 <a:ea typeface="Noto Sans SC"/>
               </a:rPr>
-              <a:t>柴火创客学院 M0 · 第 1 课 · 用 AI 点亮你的第一块硬件</a:t>
+              <a:t>柴火创客学园 M0 · 第 1 课 · 用 AI 点亮你的第一块硬件</a:t>
             </a:r>
             <a:endParaRPr lang="en-US" sz="1100"/>
           </a:p>
@@ -12187,7 +12187,7 @@
                 <a:latin typeface="Noto Sans SC"/>
                 <a:ea typeface="Noto Sans SC"/>
               </a:rPr>
-              <a:t>柴火创客学院 M0 · 第 1 课 · 用 AI 点亮你的第一块硬件</a:t>
+              <a:t>柴火创客学园 M0 · 第 1 课 · 用 AI 点亮你的第一块硬件</a:t>
             </a:r>
             <a:endParaRPr lang="en-US" sz="1100"/>
           </a:p>
@@ -12902,7 +12902,7 @@
                 <a:latin typeface="Noto Sans SC"/>
                 <a:ea typeface="Noto Sans SC"/>
               </a:rPr>
-              <a:t>柴火创客学院 M0 · 第 1 课 · 用 AI 点亮你的第一块硬件</a:t>
+              <a:t>柴火创客学园 M0 · 第 1 课 · 用 AI 点亮你的第一块硬件</a:t>
             </a:r>
             <a:endParaRPr lang="en-US" sz="1100"/>
           </a:p>
@@ -13545,7 +13545,7 @@
                 <a:latin typeface="Noto Sans SC"/>
                 <a:ea typeface="Noto Sans SC"/>
               </a:rPr>
-              <a:t>柴火创客学院 M0 · 第 1 课 · 用 AI 点亮你的第一块硬件</a:t>
+              <a:t>柴火创客学园 M0 · 第 1 课 · 用 AI 点亮你的第一块硬件</a:t>
             </a:r>
             <a:endParaRPr lang="en-US" sz="1100"/>
           </a:p>
@@ -13926,7 +13926,7 @@
                 <a:latin typeface="Noto Sans SC"/>
                 <a:ea typeface="Noto Sans SC"/>
               </a:rPr>
-              <a:t>柴火创客学院 M0 · 第 1 课 · 用 AI 点亮你的第一块硬件</a:t>
+              <a:t>柴火创客学园 M0 · 第 1 课 · 用 AI 点亮你的第一块硬件</a:t>
             </a:r>
             <a:endParaRPr lang="en-US" sz="1100"/>
           </a:p>
@@ -14699,7 +14699,7 @@
                 <a:latin typeface="Noto Sans SC"/>
                 <a:ea typeface="Noto Sans SC"/>
               </a:rPr>
-              <a:t>柴火创客学院 M0 · 第 1 课 · 用 AI 点亮你的第一块硬件</a:t>
+              <a:t>柴火创客学园 M0 · 第 1 课 · 用 AI 点亮你的第一块硬件</a:t>
             </a:r>
             <a:endParaRPr lang="en-US" sz="1100"/>
           </a:p>
@@ -15198,7 +15198,7 @@
                 <a:latin typeface="Noto Sans SC"/>
                 <a:ea typeface="Noto Sans SC"/>
               </a:rPr>
-              <a:t>柴火创客学院 M0 · 第 1 课 · 用 AI 点亮你的第一块硬件</a:t>
+              <a:t>柴火创客学园 M0 · 第 1 课 · 用 AI 点亮你的第一块硬件</a:t>
             </a:r>
             <a:endParaRPr lang="en-US" sz="1100"/>
           </a:p>
@@ -16298,7 +16298,7 @@
                 <a:latin typeface="Noto Sans SC"/>
                 <a:ea typeface="Noto Sans SC"/>
               </a:rPr>
-              <a:t>柴火创客学院 M0 · 第 1 课 · 用 AI 点亮你的第一块硬件</a:t>
+              <a:t>柴火创客学园 M0 · 第 1 课 · 用 AI 点亮你的第一块硬件</a:t>
             </a:r>
             <a:endParaRPr lang="en-US" sz="1100"/>
           </a:p>
@@ -17371,7 +17371,7 @@
                 <a:latin typeface="Noto Sans SC"/>
                 <a:ea typeface="Noto Sans SC"/>
               </a:rPr>
-              <a:t>柴火创客学院 M0 · 第 1 课 · 用 AI 点亮你的第一块硬件</a:t>
+              <a:t>柴火创客学园 M0 · 第 1 课 · 用 AI 点亮你的第一块硬件</a:t>
             </a:r>
             <a:endParaRPr lang="en-US" sz="1100"/>
           </a:p>
@@ -17702,7 +17702,7 @@
                 <a:latin typeface="Noto Sans SC"/>
                 <a:ea typeface="Noto Sans SC"/>
               </a:rPr>
-              <a:t>柴火创客学院 M0 · 第 1 课 · 用 AI 点亮你的第一块硬件</a:t>
+              <a:t>柴火创客学园 M0 · 第 1 课 · 用 AI 点亮你的第一块硬件</a:t>
             </a:r>
             <a:endParaRPr lang="en-US" sz="1100"/>
           </a:p>
@@ -18203,7 +18203,7 @@
                 <a:latin typeface="Noto Sans SC"/>
                 <a:ea typeface="Noto Sans SC"/>
               </a:rPr>
-              <a:t>柴火创客学院 M0 · 第 1 课 · 用 AI 点亮你的第一块硬件</a:t>
+              <a:t>柴火创客学园 M0 · 第 1 课 · 用 AI 点亮你的第一块硬件</a:t>
             </a:r>
             <a:endParaRPr lang="en-US" sz="1100"/>
           </a:p>
